--- a/presentation/SVC_Prezentacija.pptx
+++ b/presentation/SVC_Prezentacija.pptx
@@ -2846,7 +2846,7 @@
                 <a:ea typeface="Calibri" pitchFamily="34" charset="-122"/>
                 <a:cs typeface="Calibri" pitchFamily="34" charset="-120"/>
               </a:rPr>
-              <a:t>Plugin učitan u pravi dTwin</a:t>
+              <a:t>Sva 4 case-a rade end-to-end</a:t>
             </a:r>
             <a:endParaRPr lang="en-US" sz="1500" dirty="0"/>
           </a:p>
@@ -2885,7 +2885,7 @@
                 <a:ea typeface="Calibri" pitchFamily="34" charset="-122"/>
                 <a:cs typeface="Calibri" pitchFamily="34" charset="-120"/>
               </a:rPr>
-              <a:t>svcConv.dll kopiran u dTwin plugins folder — aplikacija se pokreće stabilno bez pada</a:t>
+              <a:t>Otkriven i otklonjen dTwin PostProc bug — case9/30/118/300 se ispravno otvaraju i rješavaju</a:t>
             </a:r>
             <a:endParaRPr lang="en-US" sz="1150" dirty="0"/>
           </a:p>
